--- a/instructor/slides/pptx/lectures/L72.pptx
+++ b/instructor/slides/pptx/lectures/L72.pptx
@@ -4375,8 +4375,8 @@
         </p:nvSpPr>
         <p:spPr>
           <a:xfrm>
-            <a:off x="640080" y="1920240"/>
-            <a:ext cx="10972800" cy="1463040"/>
+            <a:off x="640080" y="1828800"/>
+            <a:ext cx="6675120" cy="1645920"/>
           </a:xfrm>
           <a:prstGeom prst="rect">
             <a:avLst/>
@@ -4390,7 +4390,7 @@
           <a:lstStyle/>
           <a:p>
             <a:r>
-              <a:rPr sz="4400" b="1">
+              <a:rPr sz="4000" b="1">
                 <a:solidFill>
                   <a:srgbClr val="FFFFFF"/>
                 </a:solidFill>
@@ -4409,8 +4409,8 @@
         </p:nvSpPr>
         <p:spPr>
           <a:xfrm>
-            <a:off x="640080" y="3657600"/>
-            <a:ext cx="10789920" cy="1097280"/>
+            <a:off x="640080" y="3794760"/>
+            <a:ext cx="6675120" cy="1097280"/>
           </a:xfrm>
           <a:prstGeom prst="rect">
             <a:avLst/>
@@ -4424,7 +4424,7 @@
           <a:lstStyle/>
           <a:p>
             <a:r>
-              <a:rPr sz="2000" b="0">
+              <a:rPr sz="1800" b="0">
                 <a:solidFill>
                   <a:srgbClr val="B7CBDE"/>
                 </a:solidFill>
@@ -4443,8 +4443,8 @@
         </p:nvSpPr>
         <p:spPr>
           <a:xfrm>
-            <a:off x="640080" y="5029200"/>
-            <a:ext cx="10972800" cy="457200"/>
+            <a:off x="640080" y="5120640"/>
+            <a:ext cx="6766560" cy="457200"/>
           </a:xfrm>
           <a:prstGeom prst="rect">
             <a:avLst/>
@@ -4458,7 +4458,7 @@
           <a:lstStyle/>
           <a:p>
             <a:r>
-              <a:rPr sz="1600" b="0">
+              <a:rPr sz="1500" b="0">
                 <a:solidFill>
                   <a:srgbClr val="3EC6FF"/>
                 </a:solidFill>
@@ -4469,6 +4469,30 @@
           </a:p>
         </p:txBody>
       </p:sp>
+      <p:pic>
+        <p:nvPicPr>
+          <p:cNvPr id="7" name="Picture 6" descr="dw-joins.jpg"/>
+          <p:cNvPicPr>
+            <a:picLocks noChangeAspect="1"/>
+          </p:cNvPicPr>
+          <p:nvPr/>
+        </p:nvPicPr>
+        <p:blipFill>
+          <a:blip r:embed="rId2"/>
+          <a:stretch>
+            <a:fillRect/>
+          </a:stretch>
+        </p:blipFill>
+        <p:spPr>
+          <a:xfrm>
+            <a:off x="7452360" y="1325880"/>
+            <a:ext cx="4160520" cy="4160520"/>
+          </a:xfrm>
+          <a:prstGeom prst="rect">
+            <a:avLst/>
+          </a:prstGeom>
+        </p:spPr>
+      </p:pic>
     </p:spTree>
   </p:cSld>
   <p:clrMapOvr>
@@ -4572,8 +4596,8 @@
         </p:nvSpPr>
         <p:spPr>
           <a:xfrm>
-            <a:off x="640080" y="685800"/>
-            <a:ext cx="10972800" cy="1463040"/>
+            <a:off x="640080" y="658368"/>
+            <a:ext cx="10972800" cy="1645920"/>
           </a:xfrm>
           <a:prstGeom prst="rect">
             <a:avLst/>
@@ -4587,7 +4611,7 @@
           <a:lstStyle/>
           <a:p>
             <a:r>
-              <a:rPr sz="3200" b="1">
+              <a:rPr sz="3000" b="1">
                 <a:solidFill>
                   <a:srgbClr val="FFFFFF"/>
                 </a:solidFill>
@@ -4853,8 +4877,8 @@
         </p:nvSpPr>
         <p:spPr>
           <a:xfrm>
-            <a:off x="640080" y="685800"/>
-            <a:ext cx="10972800" cy="1463040"/>
+            <a:off x="640080" y="658368"/>
+            <a:ext cx="7863840" cy="1645920"/>
           </a:xfrm>
           <a:prstGeom prst="rect">
             <a:avLst/>
@@ -4868,7 +4892,7 @@
           <a:lstStyle/>
           <a:p>
             <a:r>
-              <a:rPr sz="3200" b="1">
+              <a:rPr sz="3000" b="1">
                 <a:solidFill>
                   <a:srgbClr val="FFFFFF"/>
                 </a:solidFill>
@@ -4887,8 +4911,8 @@
         </p:nvSpPr>
         <p:spPr>
           <a:xfrm>
-            <a:off x="777240" y="2286000"/>
-            <a:ext cx="10607040" cy="4754880"/>
+            <a:off x="777240" y="2331720"/>
+            <a:ext cx="7498079" cy="4754880"/>
           </a:xfrm>
           <a:prstGeom prst="rect">
             <a:avLst/>
@@ -4907,7 +4931,7 @@
               </a:spcAft>
             </a:pPr>
             <a:r>
-              <a:rPr sz="2400" b="0">
+              <a:rPr sz="2200" b="0">
                 <a:solidFill>
                   <a:srgbClr val="FFFFFF"/>
                 </a:solidFill>
@@ -4923,7 +4947,7 @@
               </a:spcAft>
             </a:pPr>
             <a:r>
-              <a:rPr sz="2400" b="0">
+              <a:rPr sz="2200" b="0">
                 <a:solidFill>
                   <a:srgbClr val="FFFFFF"/>
                 </a:solidFill>
@@ -4939,7 +4963,7 @@
               </a:spcAft>
             </a:pPr>
             <a:r>
-              <a:rPr sz="2400" b="0">
+              <a:rPr sz="2200" b="0">
                 <a:solidFill>
                   <a:srgbClr val="FFFFFF"/>
                 </a:solidFill>
@@ -4950,6 +4974,30 @@
           </a:p>
         </p:txBody>
       </p:sp>
+      <p:pic>
+        <p:nvPicPr>
+          <p:cNvPr id="6" name="Picture 5" descr="dw-joins.jpg"/>
+          <p:cNvPicPr>
+            <a:picLocks noChangeAspect="1"/>
+          </p:cNvPicPr>
+          <p:nvPr/>
+        </p:nvPicPr>
+        <p:blipFill>
+          <a:blip r:embed="rId2"/>
+          <a:stretch>
+            <a:fillRect/>
+          </a:stretch>
+        </p:blipFill>
+        <p:spPr>
+          <a:xfrm>
+            <a:off x="8732520" y="2057400"/>
+            <a:ext cx="2880360" cy="2880360"/>
+          </a:xfrm>
+          <a:prstGeom prst="rect">
+            <a:avLst/>
+          </a:prstGeom>
+        </p:spPr>
+      </p:pic>
     </p:spTree>
   </p:cSld>
   <p:clrMapOvr>
@@ -5053,8 +5101,8 @@
         </p:nvSpPr>
         <p:spPr>
           <a:xfrm>
-            <a:off x="640080" y="685800"/>
-            <a:ext cx="10972800" cy="1463040"/>
+            <a:off x="640080" y="658368"/>
+            <a:ext cx="7863840" cy="1645920"/>
           </a:xfrm>
           <a:prstGeom prst="rect">
             <a:avLst/>
@@ -5068,7 +5116,7 @@
           <a:lstStyle/>
           <a:p>
             <a:r>
-              <a:rPr sz="3200" b="1">
+              <a:rPr sz="3000" b="1">
                 <a:solidFill>
                   <a:srgbClr val="FFFFFF"/>
                 </a:solidFill>
@@ -5087,8 +5135,8 @@
         </p:nvSpPr>
         <p:spPr>
           <a:xfrm>
-            <a:off x="777240" y="2286000"/>
-            <a:ext cx="10607040" cy="4754880"/>
+            <a:off x="777240" y="2331720"/>
+            <a:ext cx="7498079" cy="4754880"/>
           </a:xfrm>
           <a:prstGeom prst="rect">
             <a:avLst/>
@@ -5107,7 +5155,7 @@
               </a:spcAft>
             </a:pPr>
             <a:r>
-              <a:rPr sz="2400" b="0">
+              <a:rPr sz="2200" b="0">
                 <a:solidFill>
                   <a:srgbClr val="FFFFFF"/>
                 </a:solidFill>
@@ -5118,6 +5166,30 @@
           </a:p>
         </p:txBody>
       </p:sp>
+      <p:pic>
+        <p:nvPicPr>
+          <p:cNvPr id="6" name="Picture 5" descr="dw-joins.jpg"/>
+          <p:cNvPicPr>
+            <a:picLocks noChangeAspect="1"/>
+          </p:cNvPicPr>
+          <p:nvPr/>
+        </p:nvPicPr>
+        <p:blipFill>
+          <a:blip r:embed="rId2"/>
+          <a:stretch>
+            <a:fillRect/>
+          </a:stretch>
+        </p:blipFill>
+        <p:spPr>
+          <a:xfrm>
+            <a:off x="8732520" y="2057400"/>
+            <a:ext cx="2880360" cy="2880360"/>
+          </a:xfrm>
+          <a:prstGeom prst="rect">
+            <a:avLst/>
+          </a:prstGeom>
+        </p:spPr>
+      </p:pic>
     </p:spTree>
   </p:cSld>
   <p:clrMapOvr>
@@ -5221,8 +5293,8 @@
         </p:nvSpPr>
         <p:spPr>
           <a:xfrm>
-            <a:off x="640080" y="685800"/>
-            <a:ext cx="10972800" cy="1463040"/>
+            <a:off x="640080" y="658368"/>
+            <a:ext cx="7863840" cy="1645920"/>
           </a:xfrm>
           <a:prstGeom prst="rect">
             <a:avLst/>
@@ -5236,7 +5308,7 @@
           <a:lstStyle/>
           <a:p>
             <a:r>
-              <a:rPr sz="3200" b="1">
+              <a:rPr sz="3000" b="1">
                 <a:solidFill>
                   <a:srgbClr val="FFFFFF"/>
                 </a:solidFill>
@@ -5255,8 +5327,8 @@
         </p:nvSpPr>
         <p:spPr>
           <a:xfrm>
-            <a:off x="777240" y="2286000"/>
-            <a:ext cx="10607040" cy="4754880"/>
+            <a:off x="777240" y="2331720"/>
+            <a:ext cx="7498079" cy="4754880"/>
           </a:xfrm>
           <a:prstGeom prst="rect">
             <a:avLst/>
@@ -5275,7 +5347,7 @@
               </a:spcAft>
             </a:pPr>
             <a:r>
-              <a:rPr sz="2400" b="0">
+              <a:rPr sz="2200" b="0">
                 <a:solidFill>
                   <a:srgbClr val="FFFFFF"/>
                 </a:solidFill>
@@ -5286,6 +5358,30 @@
           </a:p>
         </p:txBody>
       </p:sp>
+      <p:pic>
+        <p:nvPicPr>
+          <p:cNvPr id="6" name="Picture 5" descr="dw-joins.jpg"/>
+          <p:cNvPicPr>
+            <a:picLocks noChangeAspect="1"/>
+          </p:cNvPicPr>
+          <p:nvPr/>
+        </p:nvPicPr>
+        <p:blipFill>
+          <a:blip r:embed="rId2"/>
+          <a:stretch>
+            <a:fillRect/>
+          </a:stretch>
+        </p:blipFill>
+        <p:spPr>
+          <a:xfrm>
+            <a:off x="8732520" y="2057400"/>
+            <a:ext cx="2880360" cy="2880360"/>
+          </a:xfrm>
+          <a:prstGeom prst="rect">
+            <a:avLst/>
+          </a:prstGeom>
+        </p:spPr>
+      </p:pic>
     </p:spTree>
   </p:cSld>
   <p:clrMapOvr>
@@ -5389,8 +5485,8 @@
         </p:nvSpPr>
         <p:spPr>
           <a:xfrm>
-            <a:off x="640080" y="685800"/>
-            <a:ext cx="10972800" cy="1463040"/>
+            <a:off x="640080" y="658368"/>
+            <a:ext cx="7863840" cy="1645920"/>
           </a:xfrm>
           <a:prstGeom prst="rect">
             <a:avLst/>
@@ -5404,7 +5500,7 @@
           <a:lstStyle/>
           <a:p>
             <a:r>
-              <a:rPr sz="3200" b="1">
+              <a:rPr sz="3000" b="1">
                 <a:solidFill>
                   <a:srgbClr val="FFFFFF"/>
                 </a:solidFill>
@@ -5423,8 +5519,8 @@
         </p:nvSpPr>
         <p:spPr>
           <a:xfrm>
-            <a:off x="777240" y="2286000"/>
-            <a:ext cx="10607040" cy="4754880"/>
+            <a:off x="777240" y="2331720"/>
+            <a:ext cx="7498079" cy="4754880"/>
           </a:xfrm>
           <a:prstGeom prst="rect">
             <a:avLst/>
@@ -5443,7 +5539,7 @@
               </a:spcAft>
             </a:pPr>
             <a:r>
-              <a:rPr sz="2400" b="0">
+              <a:rPr sz="2200" b="0">
                 <a:solidFill>
                   <a:srgbClr val="FFFFFF"/>
                 </a:solidFill>
@@ -5454,6 +5550,30 @@
           </a:p>
         </p:txBody>
       </p:sp>
+      <p:pic>
+        <p:nvPicPr>
+          <p:cNvPr id="6" name="Picture 5" descr="dw-joins.jpg"/>
+          <p:cNvPicPr>
+            <a:picLocks noChangeAspect="1"/>
+          </p:cNvPicPr>
+          <p:nvPr/>
+        </p:nvPicPr>
+        <p:blipFill>
+          <a:blip r:embed="rId2"/>
+          <a:stretch>
+            <a:fillRect/>
+          </a:stretch>
+        </p:blipFill>
+        <p:spPr>
+          <a:xfrm>
+            <a:off x="8732520" y="2057400"/>
+            <a:ext cx="2880360" cy="2880360"/>
+          </a:xfrm>
+          <a:prstGeom prst="rect">
+            <a:avLst/>
+          </a:prstGeom>
+        </p:spPr>
+      </p:pic>
     </p:spTree>
   </p:cSld>
   <p:clrMapOvr>
@@ -5557,8 +5677,8 @@
         </p:nvSpPr>
         <p:spPr>
           <a:xfrm>
-            <a:off x="640080" y="685800"/>
-            <a:ext cx="10972800" cy="1463040"/>
+            <a:off x="640080" y="658368"/>
+            <a:ext cx="7863840" cy="1645920"/>
           </a:xfrm>
           <a:prstGeom prst="rect">
             <a:avLst/>
@@ -5572,7 +5692,7 @@
           <a:lstStyle/>
           <a:p>
             <a:r>
-              <a:rPr sz="3200" b="1">
+              <a:rPr sz="3000" b="1">
                 <a:solidFill>
                   <a:srgbClr val="FFFFFF"/>
                 </a:solidFill>
@@ -5591,8 +5711,8 @@
         </p:nvSpPr>
         <p:spPr>
           <a:xfrm>
-            <a:off x="777240" y="2286000"/>
-            <a:ext cx="10607040" cy="4754880"/>
+            <a:off x="777240" y="2331720"/>
+            <a:ext cx="7498079" cy="4754880"/>
           </a:xfrm>
           <a:prstGeom prst="rect">
             <a:avLst/>
@@ -5611,7 +5731,7 @@
               </a:spcAft>
             </a:pPr>
             <a:r>
-              <a:rPr sz="2400" b="0">
+              <a:rPr sz="2200" b="0">
                 <a:solidFill>
                   <a:srgbClr val="FFFFFF"/>
                 </a:solidFill>
@@ -5622,6 +5742,30 @@
           </a:p>
         </p:txBody>
       </p:sp>
+      <p:pic>
+        <p:nvPicPr>
+          <p:cNvPr id="6" name="Picture 5" descr="dw-joins.jpg"/>
+          <p:cNvPicPr>
+            <a:picLocks noChangeAspect="1"/>
+          </p:cNvPicPr>
+          <p:nvPr/>
+        </p:nvPicPr>
+        <p:blipFill>
+          <a:blip r:embed="rId2"/>
+          <a:stretch>
+            <a:fillRect/>
+          </a:stretch>
+        </p:blipFill>
+        <p:spPr>
+          <a:xfrm>
+            <a:off x="8732520" y="2057400"/>
+            <a:ext cx="2880360" cy="2880360"/>
+          </a:xfrm>
+          <a:prstGeom prst="rect">
+            <a:avLst/>
+          </a:prstGeom>
+        </p:spPr>
+      </p:pic>
     </p:spTree>
   </p:cSld>
   <p:clrMapOvr>
@@ -5725,8 +5869,8 @@
         </p:nvSpPr>
         <p:spPr>
           <a:xfrm>
-            <a:off x="640080" y="685800"/>
-            <a:ext cx="10972800" cy="1463040"/>
+            <a:off x="640080" y="658368"/>
+            <a:ext cx="10972800" cy="1645920"/>
           </a:xfrm>
           <a:prstGeom prst="rect">
             <a:avLst/>
@@ -5740,7 +5884,7 @@
           <a:lstStyle/>
           <a:p>
             <a:r>
-              <a:rPr sz="3200" b="1">
+              <a:rPr sz="3000" b="1">
                 <a:solidFill>
                   <a:srgbClr val="FFFFFF"/>
                 </a:solidFill>
@@ -6054,8 +6198,8 @@
         </p:nvSpPr>
         <p:spPr>
           <a:xfrm>
-            <a:off x="640080" y="685800"/>
-            <a:ext cx="10972800" cy="1463040"/>
+            <a:off x="640080" y="658368"/>
+            <a:ext cx="7863840" cy="1645920"/>
           </a:xfrm>
           <a:prstGeom prst="rect">
             <a:avLst/>
@@ -6069,7 +6213,7 @@
           <a:lstStyle/>
           <a:p>
             <a:r>
-              <a:rPr sz="3200" b="1">
+              <a:rPr sz="3000" b="1">
                 <a:solidFill>
                   <a:srgbClr val="FFFFFF"/>
                 </a:solidFill>
@@ -6088,8 +6232,8 @@
         </p:nvSpPr>
         <p:spPr>
           <a:xfrm>
-            <a:off x="777240" y="2286000"/>
-            <a:ext cx="10607040" cy="4754880"/>
+            <a:off x="777240" y="2331720"/>
+            <a:ext cx="7498079" cy="4754880"/>
           </a:xfrm>
           <a:prstGeom prst="rect">
             <a:avLst/>
@@ -6108,7 +6252,7 @@
               </a:spcAft>
             </a:pPr>
             <a:r>
-              <a:rPr sz="2400" b="0">
+              <a:rPr sz="2200" b="0">
                 <a:solidFill>
                   <a:srgbClr val="FFFFFF"/>
                 </a:solidFill>
@@ -6124,7 +6268,7 @@
               </a:spcAft>
             </a:pPr>
             <a:r>
-              <a:rPr sz="2400" b="0">
+              <a:rPr sz="2200" b="0">
                 <a:solidFill>
                   <a:srgbClr val="FFFFFF"/>
                 </a:solidFill>
@@ -6140,7 +6284,7 @@
               </a:spcAft>
             </a:pPr>
             <a:r>
-              <a:rPr sz="2400" b="0">
+              <a:rPr sz="2200" b="0">
                 <a:solidFill>
                   <a:srgbClr val="FFFFFF"/>
                 </a:solidFill>
@@ -6151,6 +6295,30 @@
           </a:p>
         </p:txBody>
       </p:sp>
+      <p:pic>
+        <p:nvPicPr>
+          <p:cNvPr id="6" name="Picture 5" descr="dw-joins.jpg"/>
+          <p:cNvPicPr>
+            <a:picLocks noChangeAspect="1"/>
+          </p:cNvPicPr>
+          <p:nvPr/>
+        </p:nvPicPr>
+        <p:blipFill>
+          <a:blip r:embed="rId2"/>
+          <a:stretch>
+            <a:fillRect/>
+          </a:stretch>
+        </p:blipFill>
+        <p:spPr>
+          <a:xfrm>
+            <a:off x="8732520" y="2057400"/>
+            <a:ext cx="2880360" cy="2880360"/>
+          </a:xfrm>
+          <a:prstGeom prst="rect">
+            <a:avLst/>
+          </a:prstGeom>
+        </p:spPr>
+      </p:pic>
     </p:spTree>
   </p:cSld>
   <p:clrMapOvr>
@@ -6254,8 +6422,8 @@
         </p:nvSpPr>
         <p:spPr>
           <a:xfrm>
-            <a:off x="640080" y="685800"/>
-            <a:ext cx="10972800" cy="1463040"/>
+            <a:off x="640080" y="658368"/>
+            <a:ext cx="7863840" cy="1645920"/>
           </a:xfrm>
           <a:prstGeom prst="rect">
             <a:avLst/>
@@ -6269,7 +6437,7 @@
           <a:lstStyle/>
           <a:p>
             <a:r>
-              <a:rPr sz="3200" b="1">
+              <a:rPr sz="3000" b="1">
                 <a:solidFill>
                   <a:srgbClr val="FFFFFF"/>
                 </a:solidFill>
@@ -6288,8 +6456,8 @@
         </p:nvSpPr>
         <p:spPr>
           <a:xfrm>
-            <a:off x="777240" y="2286000"/>
-            <a:ext cx="10607040" cy="4754880"/>
+            <a:off x="777240" y="2331720"/>
+            <a:ext cx="7498079" cy="4754880"/>
           </a:xfrm>
           <a:prstGeom prst="rect">
             <a:avLst/>
@@ -6308,7 +6476,7 @@
               </a:spcAft>
             </a:pPr>
             <a:r>
-              <a:rPr sz="2400" b="0">
+              <a:rPr sz="2200" b="0">
                 <a:solidFill>
                   <a:srgbClr val="FFFFFF"/>
                 </a:solidFill>
@@ -6324,7 +6492,7 @@
               </a:spcAft>
             </a:pPr>
             <a:r>
-              <a:rPr sz="2400" b="0">
+              <a:rPr sz="2200" b="0">
                 <a:solidFill>
                   <a:srgbClr val="FFFFFF"/>
                 </a:solidFill>
@@ -6340,7 +6508,7 @@
               </a:spcAft>
             </a:pPr>
             <a:r>
-              <a:rPr sz="2400" b="0">
+              <a:rPr sz="2200" b="0">
                 <a:solidFill>
                   <a:srgbClr val="FFFFFF"/>
                 </a:solidFill>
@@ -6351,6 +6519,30 @@
           </a:p>
         </p:txBody>
       </p:sp>
+      <p:pic>
+        <p:nvPicPr>
+          <p:cNvPr id="6" name="Picture 5" descr="dw-joins.jpg"/>
+          <p:cNvPicPr>
+            <a:picLocks noChangeAspect="1"/>
+          </p:cNvPicPr>
+          <p:nvPr/>
+        </p:nvPicPr>
+        <p:blipFill>
+          <a:blip r:embed="rId2"/>
+          <a:stretch>
+            <a:fillRect/>
+          </a:stretch>
+        </p:blipFill>
+        <p:spPr>
+          <a:xfrm>
+            <a:off x="8732520" y="2057400"/>
+            <a:ext cx="2880360" cy="2880360"/>
+          </a:xfrm>
+          <a:prstGeom prst="rect">
+            <a:avLst/>
+          </a:prstGeom>
+        </p:spPr>
+      </p:pic>
     </p:spTree>
   </p:cSld>
   <p:clrMapOvr>
@@ -6454,8 +6646,8 @@
         </p:nvSpPr>
         <p:spPr>
           <a:xfrm>
-            <a:off x="640080" y="685800"/>
-            <a:ext cx="10972800" cy="1463040"/>
+            <a:off x="640080" y="658368"/>
+            <a:ext cx="7863840" cy="1645920"/>
           </a:xfrm>
           <a:prstGeom prst="rect">
             <a:avLst/>
@@ -6469,7 +6661,7 @@
           <a:lstStyle/>
           <a:p>
             <a:r>
-              <a:rPr sz="3200" b="1">
+              <a:rPr sz="3000" b="1">
                 <a:solidFill>
                   <a:srgbClr val="FFFFFF"/>
                 </a:solidFill>
@@ -6488,8 +6680,8 @@
         </p:nvSpPr>
         <p:spPr>
           <a:xfrm>
-            <a:off x="777240" y="2286000"/>
-            <a:ext cx="10607040" cy="4754880"/>
+            <a:off x="777240" y="2331720"/>
+            <a:ext cx="7498079" cy="4754880"/>
           </a:xfrm>
           <a:prstGeom prst="rect">
             <a:avLst/>
@@ -6508,7 +6700,7 @@
               </a:spcAft>
             </a:pPr>
             <a:r>
-              <a:rPr sz="2400" b="0">
+              <a:rPr sz="2200" b="0">
                 <a:solidFill>
                   <a:srgbClr val="FFFFFF"/>
                 </a:solidFill>
@@ -6524,7 +6716,7 @@
               </a:spcAft>
             </a:pPr>
             <a:r>
-              <a:rPr sz="2400" b="0">
+              <a:rPr sz="2200" b="0">
                 <a:solidFill>
                   <a:srgbClr val="FFFFFF"/>
                 </a:solidFill>
@@ -6540,7 +6732,7 @@
               </a:spcAft>
             </a:pPr>
             <a:r>
-              <a:rPr sz="2400" b="0">
+              <a:rPr sz="2200" b="0">
                 <a:solidFill>
                   <a:srgbClr val="FFFFFF"/>
                 </a:solidFill>
@@ -6551,6 +6743,30 @@
           </a:p>
         </p:txBody>
       </p:sp>
+      <p:pic>
+        <p:nvPicPr>
+          <p:cNvPr id="6" name="Picture 5" descr="dw-joins.jpg"/>
+          <p:cNvPicPr>
+            <a:picLocks noChangeAspect="1"/>
+          </p:cNvPicPr>
+          <p:nvPr/>
+        </p:nvPicPr>
+        <p:blipFill>
+          <a:blip r:embed="rId2"/>
+          <a:stretch>
+            <a:fillRect/>
+          </a:stretch>
+        </p:blipFill>
+        <p:spPr>
+          <a:xfrm>
+            <a:off x="8732520" y="2057400"/>
+            <a:ext cx="2880360" cy="2880360"/>
+          </a:xfrm>
+          <a:prstGeom prst="rect">
+            <a:avLst/>
+          </a:prstGeom>
+        </p:spPr>
+      </p:pic>
     </p:spTree>
   </p:cSld>
   <p:clrMapOvr>
@@ -6654,8 +6870,8 @@
         </p:nvSpPr>
         <p:spPr>
           <a:xfrm>
-            <a:off x="640080" y="685800"/>
-            <a:ext cx="10972800" cy="1463040"/>
+            <a:off x="640080" y="658368"/>
+            <a:ext cx="10972800" cy="1645920"/>
           </a:xfrm>
           <a:prstGeom prst="rect">
             <a:avLst/>
@@ -6669,7 +6885,7 @@
           <a:lstStyle/>
           <a:p>
             <a:r>
-              <a:rPr sz="3200" b="1">
+              <a:rPr sz="3000" b="1">
                 <a:solidFill>
                   <a:srgbClr val="FFFFFF"/>
                 </a:solidFill>
@@ -6839,8 +7055,8 @@
         </p:nvSpPr>
         <p:spPr>
           <a:xfrm>
-            <a:off x="640080" y="685800"/>
-            <a:ext cx="10972800" cy="1463040"/>
+            <a:off x="640080" y="658368"/>
+            <a:ext cx="7863840" cy="1645920"/>
           </a:xfrm>
           <a:prstGeom prst="rect">
             <a:avLst/>
@@ -6854,7 +7070,7 @@
           <a:lstStyle/>
           <a:p>
             <a:r>
-              <a:rPr sz="3200" b="1">
+              <a:rPr sz="3000" b="1">
                 <a:solidFill>
                   <a:srgbClr val="FFFFFF"/>
                 </a:solidFill>
@@ -6873,8 +7089,8 @@
         </p:nvSpPr>
         <p:spPr>
           <a:xfrm>
-            <a:off x="777240" y="2286000"/>
-            <a:ext cx="10607040" cy="4754880"/>
+            <a:off x="777240" y="2331720"/>
+            <a:ext cx="7498079" cy="4754880"/>
           </a:xfrm>
           <a:prstGeom prst="rect">
             <a:avLst/>
@@ -6893,7 +7109,7 @@
               </a:spcAft>
             </a:pPr>
             <a:r>
-              <a:rPr sz="2400" b="0">
+              <a:rPr sz="2200" b="0">
                 <a:solidFill>
                   <a:srgbClr val="FFFFFF"/>
                 </a:solidFill>
@@ -6904,6 +7120,30 @@
           </a:p>
         </p:txBody>
       </p:sp>
+      <p:pic>
+        <p:nvPicPr>
+          <p:cNvPr id="6" name="Picture 5" descr="dw-joins.jpg"/>
+          <p:cNvPicPr>
+            <a:picLocks noChangeAspect="1"/>
+          </p:cNvPicPr>
+          <p:nvPr/>
+        </p:nvPicPr>
+        <p:blipFill>
+          <a:blip r:embed="rId2"/>
+          <a:stretch>
+            <a:fillRect/>
+          </a:stretch>
+        </p:blipFill>
+        <p:spPr>
+          <a:xfrm>
+            <a:off x="8732520" y="2057400"/>
+            <a:ext cx="2880360" cy="2880360"/>
+          </a:xfrm>
+          <a:prstGeom prst="rect">
+            <a:avLst/>
+          </a:prstGeom>
+        </p:spPr>
+      </p:pic>
     </p:spTree>
   </p:cSld>
   <p:clrMapOvr>
